--- a/presentation_paolo_spallanzani.pptx
+++ b/presentation_paolo_spallanzani.pptx
@@ -9619,8 +9619,8 @@
           </a:ln>
         </p:spPr>
       </p:sp>
-      <mc:AlternateContent xmlns:mc="http://schemas.openxmlformats.org/markup-compatibility/2006">
-        <mc:Choice xmlns:a14="http://schemas.microsoft.com/office/drawing/2010/main" Requires="a14">
+      <mc:AlternateContent xmlns:mc="http://schemas.openxmlformats.org/markup-compatibility/2006" xmlns:a14="http://schemas.microsoft.com/office/drawing/2010/main">
+        <mc:Choice Requires="a14">
           <p:graphicFrame>
             <p:nvGraphicFramePr>
               <p:cNvPr id="16" name="Table 0">
@@ -10353,7 +10353,7 @@
             </a:graphic>
           </p:graphicFrame>
         </mc:Choice>
-        <mc:Fallback>
+        <mc:Fallback xmlns="">
           <p:graphicFrame>
             <p:nvGraphicFramePr>
               <p:cNvPr id="16" name="Table 0">
@@ -19052,8 +19052,8 @@
           </a:p>
         </p:txBody>
       </p:sp>
-      <mc:AlternateContent xmlns:mc="http://schemas.openxmlformats.org/markup-compatibility/2006">
-        <mc:Choice xmlns:a14="http://schemas.microsoft.com/office/drawing/2010/main" Requires="a14">
+      <mc:AlternateContent xmlns:mc="http://schemas.openxmlformats.org/markup-compatibility/2006" xmlns:a14="http://schemas.microsoft.com/office/drawing/2010/main">
+        <mc:Choice Requires="a14">
           <p:graphicFrame>
             <p:nvGraphicFramePr>
               <p:cNvPr id="16" name="Table 0"/>
@@ -21390,7 +21390,7 @@
             </a:graphic>
           </p:graphicFrame>
         </mc:Choice>
-        <mc:Fallback>
+        <mc:Fallback xmlns="">
           <p:graphicFrame>
             <p:nvGraphicFramePr>
               <p:cNvPr id="16" name="Table 0"/>
@@ -25128,8 +25128,8 @@
           </a:p>
         </p:txBody>
       </p:sp>
-      <mc:AlternateContent xmlns:mc="http://schemas.openxmlformats.org/markup-compatibility/2006">
-        <mc:Choice xmlns:a14="http://schemas.microsoft.com/office/drawing/2010/main" Requires="a14">
+      <mc:AlternateContent xmlns:mc="http://schemas.openxmlformats.org/markup-compatibility/2006" xmlns:a14="http://schemas.microsoft.com/office/drawing/2010/main">
+        <mc:Choice Requires="a14">
           <p:sp>
             <p:nvSpPr>
               <p:cNvPr id="9" name="Text 8">
@@ -25787,7 +25787,7 @@
             </p:txBody>
           </p:sp>
         </mc:Choice>
-        <mc:Fallback>
+        <mc:Fallback xmlns="">
           <p:sp>
             <p:nvSpPr>
               <p:cNvPr id="9" name="Text 8">
@@ -26238,8 +26238,8 @@
           </a:prstGeom>
         </p:spPr>
       </p:pic>
-      <mc:AlternateContent xmlns:mc="http://schemas.openxmlformats.org/markup-compatibility/2006">
-        <mc:Choice xmlns:a14="http://schemas.microsoft.com/office/drawing/2010/main" Requires="a14">
+      <mc:AlternateContent xmlns:mc="http://schemas.openxmlformats.org/markup-compatibility/2006" xmlns:a14="http://schemas.microsoft.com/office/drawing/2010/main">
+        <mc:Choice Requires="a14">
           <p:sp>
             <p:nvSpPr>
               <p:cNvPr id="15" name="Text 8">
@@ -26405,7 +26405,7 @@
             </p:txBody>
           </p:sp>
         </mc:Choice>
-        <mc:Fallback>
+        <mc:Fallback xmlns="">
           <p:sp>
             <p:nvSpPr>
               <p:cNvPr id="15" name="Text 8">
@@ -27520,8 +27520,8 @@
         </p:nvSpPr>
         <p:spPr>
           <a:xfrm>
-            <a:off x="349068" y="890646"/>
-            <a:ext cx="4095636" cy="1309899"/>
+            <a:off x="449082" y="890646"/>
+            <a:ext cx="4493490" cy="1373923"/>
           </a:xfrm>
           <a:prstGeom prst="rect">
             <a:avLst/>
@@ -27594,7 +27594,7 @@
         </p:nvSpPr>
         <p:spPr>
           <a:xfrm>
-            <a:off x="533266" y="1257987"/>
+            <a:off x="633281" y="1257987"/>
             <a:ext cx="4251960" cy="645888"/>
           </a:xfrm>
           <a:prstGeom prst="rect">
@@ -27643,7 +27643,7 @@
                 <a:ea typeface="Calibri" pitchFamily="34" charset="-122"/>
                 <a:cs typeface="Calibri" pitchFamily="34" charset="-120"/>
               </a:rPr>
-              <a:t>Group theme into cluster</a:t>
+              <a:t>Group theme into cluster – Split if needed</a:t>
             </a:r>
           </a:p>
           <a:p>
@@ -27683,7 +27683,7 @@
         </p:nvSpPr>
         <p:spPr>
           <a:xfrm>
-            <a:off x="533266" y="901421"/>
+            <a:off x="633281" y="901421"/>
             <a:ext cx="4251960" cy="457200"/>
           </a:xfrm>
           <a:prstGeom prst="rect">
@@ -27730,8 +27730,8 @@
         </p:nvSpPr>
         <p:spPr>
           <a:xfrm>
-            <a:off x="4699296" y="890647"/>
-            <a:ext cx="4095636" cy="1309899"/>
+            <a:off x="5285815" y="890646"/>
+            <a:ext cx="3387038" cy="1309899"/>
           </a:xfrm>
           <a:prstGeom prst="rect">
             <a:avLst/>
@@ -27761,8 +27761,8 @@
         </p:nvSpPr>
         <p:spPr>
           <a:xfrm>
-            <a:off x="4842557" y="1257987"/>
-            <a:ext cx="3768177" cy="645888"/>
+            <a:off x="5407895" y="1295014"/>
+            <a:ext cx="3387038" cy="645888"/>
           </a:xfrm>
           <a:prstGeom prst="rect">
             <a:avLst/>
@@ -27809,8 +27809,8 @@
         </p:nvSpPr>
         <p:spPr>
           <a:xfrm>
-            <a:off x="4756198" y="888443"/>
-            <a:ext cx="4251960" cy="457200"/>
+            <a:off x="5328679" y="925470"/>
+            <a:ext cx="3509117" cy="457200"/>
           </a:xfrm>
           <a:prstGeom prst="rect">
             <a:avLst/>
@@ -27894,8 +27894,38 @@
         </p:blipFill>
         <p:spPr>
           <a:xfrm>
-            <a:off x="5677572" y="2340366"/>
+            <a:off x="5930261" y="2340366"/>
             <a:ext cx="2098145" cy="2187255"/>
+          </a:xfrm>
+          <a:prstGeom prst="rect">
+            <a:avLst/>
+          </a:prstGeom>
+        </p:spPr>
+      </p:pic>
+      <p:pic>
+        <p:nvPicPr>
+          <p:cNvPr id="6" name="Immagine 5">
+            <a:extLst>
+              <a:ext uri="{FF2B5EF4-FFF2-40B4-BE49-F238E27FC236}">
+                <a16:creationId xmlns:a16="http://schemas.microsoft.com/office/drawing/2014/main" id="{BBE52D13-AD2E-6F29-8B12-96B162A49AD3}"/>
+              </a:ext>
+            </a:extLst>
+          </p:cNvPr>
+          <p:cNvPicPr>
+            <a:picLocks noChangeAspect="1"/>
+          </p:cNvPicPr>
+          <p:nvPr/>
+        </p:nvPicPr>
+        <p:blipFill>
+          <a:blip r:embed="rId4"/>
+          <a:stretch>
+            <a:fillRect/>
+          </a:stretch>
+        </p:blipFill>
+        <p:spPr>
+          <a:xfrm>
+            <a:off x="518977" y="2415439"/>
+            <a:ext cx="4341516" cy="2082416"/>
           </a:xfrm>
           <a:prstGeom prst="rect">
             <a:avLst/>
